--- a/gallery/renders/typography_font_sizes_complex.pptx
+++ b/gallery/renders/typography_font_sizes_complex.pptx
@@ -36,22 +36,22 @@
         <p:spPr>
           <a:xfrm>
             <a:off x="910336" y="1806854"/>
-            <a:ext cx="5331968" cy="4608576"/>
-          </a:xfrm>
-          <a:prstGeom prst="rect">
-            <a:avLst/>
-          </a:prstGeom>
-          <a:noFill/>
-        </p:spPr>
-        <p:txBody>
-          <a:bodyPr wrap="square" lIns="0" rIns="0" tIns="0" bIns="0"/>
-          <a:lstStyle/>
-          <a:p>
-            <a:pPr algn="l">
-              <a:buNone/>
-            </a:pPr>
-            <a:r>
-              <a:rPr lang="en-US" sz="1600" b="1">
+            <a:ext cx="5331968" cy="4922520"/>
+          </a:xfrm>
+          <a:prstGeom prst="rect">
+            <a:avLst/>
+          </a:prstGeom>
+          <a:noFill/>
+        </p:spPr>
+        <p:txBody>
+          <a:bodyPr wrap="square" lIns="0" rIns="0" tIns="0" bIns="0"/>
+          <a:lstStyle/>
+          <a:p>
+            <a:pPr algn="l">
+              <a:buNone/>
+            </a:pPr>
+            <a:r>
+              <a:rPr lang="en-US" sz="1700" b="1">
                 <a:latin typeface="Arial"/>
               </a:rPr>
               <a:t>Large Header</a:t>
@@ -62,7 +62,7 @@
               <a:buNone/>
             </a:pPr>
             <a:r>
-              <a:rPr lang="en-US" sz="1600">
+              <a:rPr lang="en-US" sz="1700">
                 <a:latin typeface="Arial"/>
               </a:rPr>
               <a:t>Here is a large block of text designed to test how well the autofit engine handles text that exceeds the bounds of the 22pt layout constraint. We want to see the text shrink linearly to match the box size.</a:t>
@@ -73,7 +73,7 @@
               <a:buNone/>
             </a:pPr>
             <a:r>
-              <a:rPr lang="en-US" sz="1600" b="1">
+              <a:rPr lang="en-US" sz="1700" b="1">
                 <a:latin typeface="Arial"/>
               </a:rPr>
               <a:t>Subheader</a:t>
@@ -84,7 +84,7 @@
               <a:buNone/>
             </a:pPr>
             <a:r>
-              <a:rPr lang="en-US" sz="1600">
+              <a:rPr lang="en-US" sz="1700">
                 <a:latin typeface="Arial"/>
               </a:rPr>
               <a:t>More text to push the limits of the bounding box. The left column is very tall but we will force it to shrink by adding an excessive amount of text. This is an excessive amount of text. This is an excessive amount of text. This is an excessive amount of text. This is an excessive amount of text. This is an excessive amount of text. This is an excessive amount of text. This is an excessive amount of text. This is an excessive amount of text. This is an excessive amount of text. This is an excessive amount of text. This is an excessive amount of text. This is an excessive amount of text. This is an excessive amount of text.</a:t>
@@ -190,7 +190,7 @@
         <p:spPr>
           <a:xfrm>
             <a:off x="910336" y="2092147"/>
-            <a:ext cx="11184128" cy="4066031"/>
+            <a:ext cx="11184128" cy="3855720"/>
           </a:xfrm>
           <a:prstGeom prst="rect">
             <a:avLst/>
@@ -244,7 +244,7 @@
         <p:spPr>
           <a:xfrm>
             <a:off x="910336" y="687628"/>
-            <a:ext cx="11184128" cy="609599"/>
+            <a:ext cx="11184128" cy="609600"/>
           </a:xfrm>
           <a:prstGeom prst="rect">
             <a:avLst/>

--- a/gallery/renders/typography_font_sizes_complex.pptx
+++ b/gallery/renders/typography_font_sizes_complex.pptx
@@ -36,22 +36,22 @@
         <p:spPr>
           <a:xfrm>
             <a:off x="910336" y="1806854"/>
-            <a:ext cx="5331968" cy="4922520"/>
-          </a:xfrm>
-          <a:prstGeom prst="rect">
-            <a:avLst/>
-          </a:prstGeom>
-          <a:noFill/>
-        </p:spPr>
-        <p:txBody>
-          <a:bodyPr wrap="square" lIns="0" rIns="0" tIns="0" bIns="0"/>
-          <a:lstStyle/>
-          <a:p>
-            <a:pPr algn="l">
-              <a:buNone/>
-            </a:pPr>
-            <a:r>
-              <a:rPr lang="en-US" sz="1700" b="1">
+            <a:ext cx="5331968" cy="4419600"/>
+          </a:xfrm>
+          <a:prstGeom prst="rect">
+            <a:avLst/>
+          </a:prstGeom>
+          <a:noFill/>
+        </p:spPr>
+        <p:txBody>
+          <a:bodyPr wrap="square" lIns="0" rIns="0" tIns="0" bIns="0"/>
+          <a:lstStyle/>
+          <a:p>
+            <a:pPr algn="l">
+              <a:buNone/>
+            </a:pPr>
+            <a:r>
+              <a:rPr lang="en-US" sz="1600" b="1">
                 <a:latin typeface="Arial"/>
               </a:rPr>
               <a:t>Large Header</a:t>
@@ -62,7 +62,7 @@
               <a:buNone/>
             </a:pPr>
             <a:r>
-              <a:rPr lang="en-US" sz="1700">
+              <a:rPr lang="en-US" sz="1600">
                 <a:latin typeface="Arial"/>
               </a:rPr>
               <a:t>Here is a large block of text designed to test how well the autofit engine handles text that exceeds the bounds of the 22pt layout constraint. We want to see the text shrink linearly to match the box size.</a:t>
@@ -73,7 +73,7 @@
               <a:buNone/>
             </a:pPr>
             <a:r>
-              <a:rPr lang="en-US" sz="1700" b="1">
+              <a:rPr lang="en-US" sz="1600" b="1">
                 <a:latin typeface="Arial"/>
               </a:rPr>
               <a:t>Subheader</a:t>
@@ -84,7 +84,7 @@
               <a:buNone/>
             </a:pPr>
             <a:r>
-              <a:rPr lang="en-US" sz="1700">
+              <a:rPr lang="en-US" sz="1600">
                 <a:latin typeface="Arial"/>
               </a:rPr>
               <a:t>More text to push the limits of the bounding box. The left column is very tall but we will force it to shrink by adding an excessive amount of text. This is an excessive amount of text. This is an excessive amount of text. This is an excessive amount of text. This is an excessive amount of text. This is an excessive amount of text. This is an excessive amount of text. This is an excessive amount of text. This is an excessive amount of text. This is an excessive amount of text. This is an excessive amount of text. This is an excessive amount of text. This is an excessive amount of text. This is an excessive amount of text.</a:t>
@@ -190,7 +190,7 @@
         <p:spPr>
           <a:xfrm>
             <a:off x="910336" y="2092147"/>
-            <a:ext cx="11184128" cy="3855720"/>
+            <a:ext cx="11184128" cy="3884929"/>
           </a:xfrm>
           <a:prstGeom prst="rect">
             <a:avLst/>
@@ -244,7 +244,7 @@
         <p:spPr>
           <a:xfrm>
             <a:off x="910336" y="687628"/>
-            <a:ext cx="11184128" cy="609600"/>
+            <a:ext cx="11184128" cy="609599"/>
           </a:xfrm>
           <a:prstGeom prst="rect">
             <a:avLst/>

--- a/gallery/renders/typography_font_sizes_complex.pptx
+++ b/gallery/renders/typography_font_sizes_complex.pptx
@@ -36,22 +36,22 @@
         <p:spPr>
           <a:xfrm>
             <a:off x="910336" y="1806854"/>
-            <a:ext cx="5331968" cy="4419600"/>
-          </a:xfrm>
-          <a:prstGeom prst="rect">
-            <a:avLst/>
-          </a:prstGeom>
-          <a:noFill/>
-        </p:spPr>
-        <p:txBody>
-          <a:bodyPr wrap="square" lIns="0" rIns="0" tIns="0" bIns="0"/>
-          <a:lstStyle/>
-          <a:p>
-            <a:pPr algn="l">
-              <a:buNone/>
-            </a:pPr>
-            <a:r>
-              <a:rPr lang="en-US" sz="1600" b="1">
+            <a:ext cx="5331968" cy="4695825"/>
+          </a:xfrm>
+          <a:prstGeom prst="rect">
+            <a:avLst/>
+          </a:prstGeom>
+          <a:noFill/>
+        </p:spPr>
+        <p:txBody>
+          <a:bodyPr wrap="square" lIns="0" rIns="0" tIns="0" bIns="0"/>
+          <a:lstStyle/>
+          <a:p>
+            <a:pPr algn="l">
+              <a:buNone/>
+            </a:pPr>
+            <a:r>
+              <a:rPr lang="en-US" sz="1700" b="1">
                 <a:latin typeface="Arial"/>
               </a:rPr>
               <a:t>Large Header</a:t>
@@ -62,7 +62,7 @@
               <a:buNone/>
             </a:pPr>
             <a:r>
-              <a:rPr lang="en-US" sz="1600">
+              <a:rPr lang="en-US" sz="1700">
                 <a:latin typeface="Arial"/>
               </a:rPr>
               <a:t>Here is a large block of text designed to test how well the autofit engine handles text that exceeds the bounds of the 22pt layout constraint. We want to see the text shrink linearly to match the box size.</a:t>
@@ -73,7 +73,7 @@
               <a:buNone/>
             </a:pPr>
             <a:r>
-              <a:rPr lang="en-US" sz="1600" b="1">
+              <a:rPr lang="en-US" sz="1700" b="1">
                 <a:latin typeface="Arial"/>
               </a:rPr>
               <a:t>Subheader</a:t>
@@ -84,7 +84,7 @@
               <a:buNone/>
             </a:pPr>
             <a:r>
-              <a:rPr lang="en-US" sz="1600">
+              <a:rPr lang="en-US" sz="1700">
                 <a:latin typeface="Arial"/>
               </a:rPr>
               <a:t>More text to push the limits of the bounding box. The left column is very tall but we will force it to shrink by adding an excessive amount of text. This is an excessive amount of text. This is an excessive amount of text. This is an excessive amount of text. This is an excessive amount of text. This is an excessive amount of text. This is an excessive amount of text. This is an excessive amount of text. This is an excessive amount of text. This is an excessive amount of text. This is an excessive amount of text. This is an excessive amount of text. This is an excessive amount of text. This is an excessive amount of text.</a:t>
@@ -190,22 +190,22 @@
         <p:spPr>
           <a:xfrm>
             <a:off x="910336" y="2092147"/>
-            <a:ext cx="11184128" cy="3884929"/>
-          </a:xfrm>
-          <a:prstGeom prst="rect">
-            <a:avLst/>
-          </a:prstGeom>
-          <a:noFill/>
-        </p:spPr>
-        <p:txBody>
-          <a:bodyPr wrap="square" lIns="0" rIns="0" tIns="0" bIns="0"/>
-          <a:lstStyle/>
-          <a:p>
-            <a:pPr algn="l">
-              <a:buNone/>
-            </a:pPr>
-            <a:r>
-              <a:rPr lang="en-US" sz="2300">
+            <a:ext cx="11184128" cy="4053839"/>
+          </a:xfrm>
+          <a:prstGeom prst="rect">
+            <a:avLst/>
+          </a:prstGeom>
+          <a:noFill/>
+        </p:spPr>
+        <p:txBody>
+          <a:bodyPr wrap="square" lIns="0" rIns="0" tIns="0" bIns="0"/>
+          <a:lstStyle/>
+          <a:p>
+            <a:pPr algn="l">
+              <a:buNone/>
+            </a:pPr>
+            <a:r>
+              <a:rPr lang="en-US" sz="2400">
                 <a:latin typeface="Arial"/>
               </a:rPr>
               <a:t>In the title body, the default size is 24pt. Let's add multiple paragraphs to see how paragraph spacing holds up under auto-fit constraints.</a:t>
@@ -216,7 +216,7 @@
               <a:buNone/>
             </a:pPr>
             <a:r>
-              <a:rPr lang="en-US" sz="2300">
+              <a:rPr lang="en-US" sz="2400">
                 <a:latin typeface="Arial"/>
               </a:rPr>
               <a:t>Second paragraph. This paragraph should have a small gap above it.</a:t>
@@ -227,7 +227,7 @@
               <a:buNone/>
             </a:pPr>
             <a:r>
-              <a:rPr lang="en-US" sz="2300">
+              <a:rPr lang="en-US" sz="2400">
                 <a:latin typeface="Arial"/>
               </a:rPr>
               <a:t>Third paragraph. We need to write enough text to force the text to shrink. So I will repeat this sentence. So I will repeat this sentence. So I will repeat this sentence. So I will repeat this sentence. So I will repeat this sentence. So I will repeat this sentence. So I will repeat this sentence. So I will repeat this sentence. So I will repeat this sentence. So I will repeat this sentence. So I will repeat this sentence. So I will repeat this sentence. So I will repeat this sentence. So I will repeat this sentence. So I will repeat this sentence. So I will repeat this sentence. So I will repeat this sentence. So I will repeat this sentence.</a:t>
